--- a/~sasano/lecture/pn2/26/P08.pptx
+++ b/~sasano/lecture/pn2/26/P08.pptx
@@ -271,7 +271,7 @@
             <a:fld id="{96CCB013-1BCF-4E3C-9FB7-214F93471AFE}" type="datetimeFigureOut">
               <a:rPr kumimoji="1" lang="ja-JP" altLang="en-US" smtClean="0"/>
               <a:pPr/>
-              <a:t>2025/11/18</a:t>
+              <a:t>2026/9/28</a:t>
             </a:fld>
             <a:endParaRPr kumimoji="1" lang="ja-JP" altLang="en-US"/>
           </a:p>
@@ -1245,7 +1245,7 @@
             <a:fld id="{E90ED720-0104-4369-84BC-D37694168613}" type="datetimeFigureOut">
               <a:rPr kumimoji="1" lang="ja-JP" altLang="en-US" smtClean="0"/>
               <a:pPr/>
-              <a:t>2025/11/18</a:t>
+              <a:t>2026/9/28</a:t>
             </a:fld>
             <a:endParaRPr kumimoji="1" lang="ja-JP" altLang="en-US"/>
           </a:p>
@@ -1442,7 +1442,7 @@
             <a:fld id="{E90ED720-0104-4369-84BC-D37694168613}" type="datetimeFigureOut">
               <a:rPr kumimoji="1" lang="ja-JP" altLang="en-US" smtClean="0"/>
               <a:pPr/>
-              <a:t>2025/11/18</a:t>
+              <a:t>2026/9/28</a:t>
             </a:fld>
             <a:endParaRPr kumimoji="1" lang="ja-JP" altLang="en-US"/>
           </a:p>
@@ -1649,7 +1649,7 @@
             <a:fld id="{E90ED720-0104-4369-84BC-D37694168613}" type="datetimeFigureOut">
               <a:rPr kumimoji="1" lang="ja-JP" altLang="en-US" smtClean="0"/>
               <a:pPr/>
-              <a:t>2025/11/18</a:t>
+              <a:t>2026/9/28</a:t>
             </a:fld>
             <a:endParaRPr kumimoji="1" lang="ja-JP" altLang="en-US"/>
           </a:p>
@@ -1846,7 +1846,7 @@
             <a:fld id="{E90ED720-0104-4369-84BC-D37694168613}" type="datetimeFigureOut">
               <a:rPr kumimoji="1" lang="ja-JP" altLang="en-US" smtClean="0"/>
               <a:pPr/>
-              <a:t>2025/11/18</a:t>
+              <a:t>2026/9/28</a:t>
             </a:fld>
             <a:endParaRPr kumimoji="1" lang="ja-JP" altLang="en-US"/>
           </a:p>
@@ -2088,7 +2088,7 @@
             <a:fld id="{E90ED720-0104-4369-84BC-D37694168613}" type="datetimeFigureOut">
               <a:rPr kumimoji="1" lang="ja-JP" altLang="en-US" smtClean="0"/>
               <a:pPr/>
-              <a:t>2025/11/18</a:t>
+              <a:t>2026/9/28</a:t>
             </a:fld>
             <a:endParaRPr kumimoji="1" lang="ja-JP" altLang="en-US"/>
           </a:p>
@@ -2434,7 +2434,7 @@
             <a:fld id="{E90ED720-0104-4369-84BC-D37694168613}" type="datetimeFigureOut">
               <a:rPr kumimoji="1" lang="ja-JP" altLang="en-US" smtClean="0"/>
               <a:pPr/>
-              <a:t>2025/11/18</a:t>
+              <a:t>2026/9/28</a:t>
             </a:fld>
             <a:endParaRPr kumimoji="1" lang="ja-JP" altLang="en-US"/>
           </a:p>
@@ -2914,7 +2914,7 @@
             <a:fld id="{E90ED720-0104-4369-84BC-D37694168613}" type="datetimeFigureOut">
               <a:rPr kumimoji="1" lang="ja-JP" altLang="en-US" smtClean="0"/>
               <a:pPr/>
-              <a:t>2025/11/18</a:t>
+              <a:t>2026/9/28</a:t>
             </a:fld>
             <a:endParaRPr kumimoji="1" lang="ja-JP" altLang="en-US"/>
           </a:p>
@@ -3028,7 +3028,7 @@
             <a:fld id="{E90ED720-0104-4369-84BC-D37694168613}" type="datetimeFigureOut">
               <a:rPr kumimoji="1" lang="ja-JP" altLang="en-US" smtClean="0"/>
               <a:pPr/>
-              <a:t>2025/11/18</a:t>
+              <a:t>2026/9/28</a:t>
             </a:fld>
             <a:endParaRPr kumimoji="1" lang="ja-JP" altLang="en-US"/>
           </a:p>
@@ -3120,7 +3120,7 @@
             <a:fld id="{E90ED720-0104-4369-84BC-D37694168613}" type="datetimeFigureOut">
               <a:rPr kumimoji="1" lang="ja-JP" altLang="en-US" smtClean="0"/>
               <a:pPr/>
-              <a:t>2025/11/18</a:t>
+              <a:t>2026/9/28</a:t>
             </a:fld>
             <a:endParaRPr kumimoji="1" lang="ja-JP" altLang="en-US"/>
           </a:p>
@@ -3424,7 +3424,7 @@
             <a:fld id="{E90ED720-0104-4369-84BC-D37694168613}" type="datetimeFigureOut">
               <a:rPr kumimoji="1" lang="ja-JP" altLang="en-US" smtClean="0"/>
               <a:pPr/>
-              <a:t>2025/11/18</a:t>
+              <a:t>2026/9/28</a:t>
             </a:fld>
             <a:endParaRPr kumimoji="1" lang="ja-JP" altLang="en-US"/>
           </a:p>
@@ -3673,7 +3673,7 @@
             <a:fld id="{E90ED720-0104-4369-84BC-D37694168613}" type="datetimeFigureOut">
               <a:rPr kumimoji="1" lang="ja-JP" altLang="en-US" smtClean="0"/>
               <a:pPr/>
-              <a:t>2025/11/18</a:t>
+              <a:t>2026/9/28</a:t>
             </a:fld>
             <a:endParaRPr kumimoji="1" lang="ja-JP" altLang="en-US"/>
           </a:p>
@@ -3913,7 +3913,7 @@
             <a:fld id="{E90ED720-0104-4369-84BC-D37694168613}" type="datetimeFigureOut">
               <a:rPr kumimoji="1" lang="ja-JP" altLang="en-US" smtClean="0"/>
               <a:pPr/>
-              <a:t>2025/11/18</a:t>
+              <a:t>2026/9/28</a:t>
             </a:fld>
             <a:endParaRPr kumimoji="1" lang="ja-JP" altLang="en-US"/>
           </a:p>
@@ -4344,8 +4344,8 @@
         </p:nvSpPr>
         <p:spPr>
           <a:xfrm>
-            <a:off x="2428860" y="5058803"/>
-            <a:ext cx="4019049" cy="584775"/>
+            <a:off x="3727858" y="4941168"/>
+            <a:ext cx="1688283" cy="584775"/>
           </a:xfrm>
           <a:prstGeom prst="rect">
             <a:avLst/>
@@ -4358,9 +4358,14 @@
           </a:bodyPr>
           <a:lstStyle/>
           <a:p>
+            <a:pPr algn="ctr"/>
+            <a:r>
+              <a:rPr kumimoji="1" lang="ja-JP" altLang="en-US" sz="3200"/>
+              <a:t>篠埜　</a:t>
+            </a:r>
             <a:r>
               <a:rPr kumimoji="1" lang="ja-JP" altLang="en-US" sz="3200" dirty="0"/>
-              <a:t>情報工学科   篠埜　功</a:t>
+              <a:t>功</a:t>
             </a:r>
           </a:p>
         </p:txBody>
